--- a/fig/installation_procedure.pptx
+++ b/fig/installation_procedure.pptx
@@ -3592,47 +3592,11 @@
           <a:lstStyle/>
           <a:p>
             <a:pPr algn="ctr"/>
-            <a:r>
-              <a:rPr lang="ja-JP" altLang="en-US" sz="2000" dirty="0">
-                <a:solidFill>
-                  <a:schemeClr val="tx1"/>
-                </a:solidFill>
-              </a:rPr>
-              <a:t>プラグインファイル</a:t>
-            </a:r>
-            <a:endParaRPr lang="en-US" altLang="ja-JP" sz="2000" dirty="0">
+            <a:endParaRPr lang="ja-JP" altLang="en-US" sz="2000" dirty="0">
               <a:solidFill>
                 <a:schemeClr val="tx1"/>
               </a:solidFill>
             </a:endParaRPr>
-          </a:p>
-          <a:p>
-            <a:pPr algn="ctr"/>
-            <a:r>
-              <a:rPr lang="ja-JP" altLang="en-US" sz="2000" dirty="0">
-                <a:solidFill>
-                  <a:schemeClr val="tx1"/>
-                </a:solidFill>
-              </a:rPr>
-              <a:t>（</a:t>
-            </a:r>
-            <a:r>
-              <a:rPr lang="en-US" altLang="ja-JP" sz="2000" dirty="0">
-                <a:solidFill>
-                  <a:schemeClr val="tx1"/>
-                </a:solidFill>
-                <a:latin typeface="Consolas" panose="020B0609020204030204" pitchFamily="49" charset="0"/>
-              </a:rPr>
-              <a:t>.ts</a:t>
-            </a:r>
-            <a:r>
-              <a:rPr lang="ja-JP" altLang="en-US" sz="2000" dirty="0">
-                <a:solidFill>
-                  <a:schemeClr val="tx1"/>
-                </a:solidFill>
-              </a:rPr>
-              <a:t>）を用意</a:t>
-            </a:r>
           </a:p>
         </p:txBody>
       </p:sp>
@@ -4026,14 +3990,11 @@
           <a:lstStyle/>
           <a:p>
             <a:pPr algn="ctr"/>
-            <a:r>
-              <a:rPr lang="ja-JP" altLang="en-US" sz="2000" dirty="0">
-                <a:solidFill>
-                  <a:schemeClr val="tx1"/>
-                </a:solidFill>
-              </a:rPr>
-              <a:t>ファイル検知</a:t>
-            </a:r>
+            <a:endParaRPr lang="ja-JP" altLang="en-US" sz="2000" dirty="0">
+              <a:solidFill>
+                <a:schemeClr val="tx1"/>
+              </a:solidFill>
+            </a:endParaRPr>
           </a:p>
         </p:txBody>
       </p:sp>
@@ -4131,30 +4092,6 @@
           <a:lstStyle/>
           <a:p>
             <a:pPr algn="ctr"/>
-            <a:r>
-              <a:rPr lang="ja-JP" altLang="en-US" sz="2000" dirty="0">
-                <a:solidFill>
-                  <a:schemeClr val="tx1"/>
-                </a:solidFill>
-              </a:rPr>
-              <a:t>読み込み</a:t>
-            </a:r>
-            <a:endParaRPr lang="en-US" altLang="ja-JP" sz="2000" dirty="0">
-              <a:solidFill>
-                <a:schemeClr val="tx1"/>
-              </a:solidFill>
-            </a:endParaRPr>
-          </a:p>
-          <a:p>
-            <a:pPr algn="ctr"/>
-            <a:r>
-              <a:rPr lang="ja-JP" altLang="en-US" sz="2000" dirty="0">
-                <a:solidFill>
-                  <a:schemeClr val="tx1"/>
-                </a:solidFill>
-              </a:rPr>
-              <a:t>初期化</a:t>
-            </a:r>
             <a:endParaRPr lang="en-US" altLang="ja-JP" sz="2000" dirty="0">
               <a:solidFill>
                 <a:schemeClr val="tx1"/>
@@ -4434,14 +4371,14 @@
           <a:p>
             <a:pPr algn="ctr"/>
             <a:r>
-              <a:rPr lang="ja-JP" altLang="en-US" sz="2000" dirty="0">
+              <a:rPr lang="ja-JP" altLang="en-US" sz="2800" dirty="0">
                 <a:solidFill>
                   <a:schemeClr val="tx1"/>
                 </a:solidFill>
               </a:rPr>
               <a:t>サイドバー</a:t>
             </a:r>
-            <a:endParaRPr lang="en-US" altLang="ja-JP" sz="2000" dirty="0">
+            <a:endParaRPr lang="en-US" altLang="ja-JP" sz="2800" dirty="0">
               <a:solidFill>
                 <a:schemeClr val="tx1"/>
               </a:solidFill>
@@ -4450,7 +4387,7 @@
           <a:p>
             <a:pPr algn="ctr"/>
             <a:r>
-              <a:rPr lang="ja-JP" altLang="en-US" sz="2000" dirty="0">
+              <a:rPr lang="ja-JP" altLang="en-US" sz="2800" dirty="0">
                 <a:solidFill>
                   <a:schemeClr val="tx1"/>
                 </a:solidFill>
@@ -4511,12 +4448,28 @@
           <a:p>
             <a:pPr algn="ctr"/>
             <a:r>
-              <a:rPr lang="ja-JP" altLang="en-US" sz="2000" dirty="0">
+              <a:rPr lang="ja-JP" altLang="en-US" sz="2800" dirty="0">
                 <a:solidFill>
                   <a:schemeClr val="tx1"/>
                 </a:solidFill>
               </a:rPr>
-              <a:t>メニューに追加</a:t>
+              <a:t>メニューに</a:t>
+            </a:r>
+            <a:endParaRPr lang="en-US" altLang="ja-JP" sz="2800" dirty="0">
+              <a:solidFill>
+                <a:schemeClr val="tx1"/>
+              </a:solidFill>
+            </a:endParaRPr>
+          </a:p>
+          <a:p>
+            <a:pPr algn="ctr"/>
+            <a:r>
+              <a:rPr lang="ja-JP" altLang="en-US" sz="2800" dirty="0">
+                <a:solidFill>
+                  <a:schemeClr val="tx1"/>
+                </a:solidFill>
+              </a:rPr>
+              <a:t>追加</a:t>
             </a:r>
           </a:p>
         </p:txBody>
@@ -4571,30 +4524,11 @@
           <a:lstStyle/>
           <a:p>
             <a:pPr algn="ctr"/>
-            <a:r>
-              <a:rPr lang="ja-JP" altLang="en-US" sz="2000" dirty="0">
-                <a:solidFill>
-                  <a:schemeClr val="tx1"/>
-                </a:solidFill>
-              </a:rPr>
-              <a:t>専用ウィンドウ</a:t>
-            </a:r>
-            <a:endParaRPr lang="en-US" altLang="ja-JP" sz="2000" dirty="0">
+            <a:endParaRPr lang="ja-JP" altLang="en-US" sz="2000" dirty="0">
               <a:solidFill>
                 <a:schemeClr val="tx1"/>
               </a:solidFill>
             </a:endParaRPr>
-          </a:p>
-          <a:p>
-            <a:pPr algn="ctr"/>
-            <a:r>
-              <a:rPr lang="ja-JP" altLang="en-US" sz="2000" dirty="0">
-                <a:solidFill>
-                  <a:schemeClr val="tx1"/>
-                </a:solidFill>
-              </a:rPr>
-              <a:t>を表示</a:t>
-            </a:r>
           </a:p>
         </p:txBody>
       </p:sp>
@@ -4612,8 +4546,8 @@
         </p:nvSpPr>
         <p:spPr>
           <a:xfrm>
-            <a:off x="9033291" y="907163"/>
-            <a:ext cx="2003752" cy="566047"/>
+            <a:off x="8880869" y="907163"/>
+            <a:ext cx="2450411" cy="566047"/>
           </a:xfrm>
           <a:prstGeom prst="rect">
             <a:avLst/>
@@ -4646,14 +4580,11 @@
           <a:lstStyle/>
           <a:p>
             <a:pPr algn="ctr"/>
-            <a:r>
-              <a:rPr kumimoji="1" lang="ja-JP" altLang="en-US" sz="2000" dirty="0">
-                <a:solidFill>
-                  <a:schemeClr val="tx1"/>
-                </a:solidFill>
-              </a:rPr>
-              <a:t>  画面への反映</a:t>
-            </a:r>
+            <a:endParaRPr kumimoji="1" lang="ja-JP" altLang="en-US" sz="2000" dirty="0">
+              <a:solidFill>
+                <a:schemeClr val="tx1"/>
+              </a:solidFill>
+            </a:endParaRPr>
           </a:p>
         </p:txBody>
       </p:sp>
@@ -4936,7 +4867,7 @@
         <p:spPr>
           <a:xfrm>
             <a:off x="12712439" y="1016479"/>
-            <a:ext cx="2738835" cy="5079158"/>
+            <a:ext cx="2891278" cy="5079158"/>
           </a:xfrm>
           <a:prstGeom prst="roundRect">
             <a:avLst>
@@ -4993,8 +4924,8 @@
         </p:nvSpPr>
         <p:spPr>
           <a:xfrm>
-            <a:off x="649506" y="4431710"/>
-            <a:ext cx="3115601" cy="1508105"/>
+            <a:off x="481342" y="4305590"/>
+            <a:ext cx="3398374" cy="1754326"/>
           </a:xfrm>
           <a:prstGeom prst="rect">
             <a:avLst/>
@@ -5009,48 +4940,60 @@
           <a:p>
             <a:pPr algn="ctr"/>
             <a:r>
-              <a:rPr lang="ja-JP" altLang="en-US" sz="2000" dirty="0"/>
+              <a:rPr lang="ja-JP" altLang="en-US" sz="2400" dirty="0"/>
               <a:t>指定されている</a:t>
             </a:r>
-            <a:endParaRPr lang="en-US" altLang="ja-JP" sz="2000" dirty="0"/>
+            <a:endParaRPr lang="en-US" altLang="ja-JP" sz="2400" dirty="0"/>
           </a:p>
           <a:p>
             <a:pPr algn="ctr"/>
             <a:r>
-              <a:rPr lang="ja-JP" altLang="en-US" sz="2000" dirty="0"/>
+              <a:rPr lang="ja-JP" altLang="en-US" sz="2400" dirty="0"/>
               <a:t>フォルダ</a:t>
             </a:r>
-            <a:endParaRPr lang="en-US" altLang="ja-JP" sz="2000" dirty="0"/>
+            <a:endParaRPr lang="en-US" altLang="ja-JP" sz="2400" dirty="0"/>
           </a:p>
           <a:p>
             <a:pPr algn="ctr"/>
             <a:r>
-              <a:rPr lang="en-US" altLang="ja-JP" sz="1600" dirty="0">
+              <a:rPr lang="en-US" altLang="ja-JP" spc="-300" dirty="0">
                 <a:latin typeface="Consolas" panose="020B0609020204030204" pitchFamily="49" charset="0"/>
               </a:rPr>
-              <a:t>(public/src/DawiyPlugins)</a:t>
+              <a:t>(</a:t>
+            </a:r>
+            <a:r>
+              <a:rPr lang="en-US" altLang="ja-JP" dirty="0">
+                <a:latin typeface="Consolas" panose="020B0609020204030204" pitchFamily="49" charset="0"/>
+              </a:rPr>
+              <a:t>public/src/DawiyPlugin</a:t>
+            </a:r>
+            <a:r>
+              <a:rPr lang="en-US" altLang="ja-JP" spc="-300" dirty="0">
+                <a:latin typeface="Consolas" panose="020B0609020204030204" pitchFamily="49" charset="0"/>
+              </a:rPr>
+              <a:t>s)</a:t>
             </a:r>
           </a:p>
           <a:p>
             <a:pPr algn="ctr"/>
             <a:r>
-              <a:rPr lang="ja-JP" altLang="en-US" sz="2000" dirty="0"/>
+              <a:rPr lang="ja-JP" altLang="en-US" sz="2400" dirty="0"/>
               <a:t>に入れる</a:t>
             </a:r>
-            <a:endParaRPr lang="en-US" altLang="ja-JP" sz="2000" dirty="0"/>
+            <a:endParaRPr lang="en-US" altLang="ja-JP" sz="2400" dirty="0"/>
           </a:p>
           <a:p>
             <a:pPr algn="ctr"/>
             <a:r>
-              <a:rPr lang="ja-JP" altLang="en-US" sz="1600" dirty="0"/>
+              <a:rPr lang="ja-JP" altLang="en-US" dirty="0"/>
               <a:t>（または</a:t>
             </a:r>
             <a:r>
-              <a:rPr lang="en-US" altLang="ja-JP" sz="1600" dirty="0"/>
+              <a:rPr lang="en-US" altLang="ja-JP" dirty="0"/>
               <a:t>D&amp;D</a:t>
             </a:r>
             <a:r>
-              <a:rPr lang="ja-JP" altLang="en-US" sz="1600" dirty="0"/>
+              <a:rPr lang="ja-JP" altLang="en-US" dirty="0"/>
               <a:t>）</a:t>
             </a:r>
           </a:p>
@@ -5283,7 +5226,7 @@
         </p:nvSpPr>
         <p:spPr>
           <a:xfrm>
-            <a:off x="12788538" y="4951925"/>
+            <a:off x="12788538" y="5141108"/>
             <a:ext cx="1282508" cy="461665"/>
           </a:xfrm>
           <a:prstGeom prst="rect">
@@ -5333,7 +5276,7 @@
         <p:spPr>
           <a:xfrm>
             <a:off x="13285468" y="1735525"/>
-            <a:ext cx="1971844" cy="307777"/>
+            <a:ext cx="1971844" cy="400110"/>
           </a:xfrm>
           <a:prstGeom prst="rect">
             <a:avLst/>
@@ -5347,7 +5290,7 @@
           <a:lstStyle/>
           <a:p>
             <a:r>
-              <a:rPr kumimoji="1" lang="ja-JP" altLang="en-US" sz="1400" dirty="0"/>
+              <a:rPr kumimoji="1" lang="ja-JP" altLang="en-US" sz="2000" dirty="0"/>
               <a:t>メロディ生成等</a:t>
             </a:r>
           </a:p>
@@ -5367,8 +5310,8 @@
         </p:nvSpPr>
         <p:spPr>
           <a:xfrm>
-            <a:off x="13285468" y="2660897"/>
-            <a:ext cx="2037598" cy="307777"/>
+            <a:off x="13285468" y="2639877"/>
+            <a:ext cx="2230626" cy="400110"/>
           </a:xfrm>
           <a:prstGeom prst="rect">
             <a:avLst/>
@@ -5382,7 +5325,7 @@
           <a:lstStyle/>
           <a:p>
             <a:r>
-              <a:rPr kumimoji="1" lang="ja-JP" altLang="en-US" sz="1400" dirty="0"/>
+              <a:rPr kumimoji="1" lang="ja-JP" altLang="en-US" sz="2000" dirty="0"/>
               <a:t>ヒューマナイズ等</a:t>
             </a:r>
           </a:p>
@@ -5402,8 +5345,8 @@
         </p:nvSpPr>
         <p:spPr>
           <a:xfrm>
-            <a:off x="13285468" y="3612702"/>
-            <a:ext cx="2037598" cy="307777"/>
+            <a:off x="13285468" y="3591682"/>
+            <a:ext cx="2037598" cy="400110"/>
           </a:xfrm>
           <a:prstGeom prst="rect">
             <a:avLst/>
@@ -5417,7 +5360,7 @@
           <a:lstStyle/>
           <a:p>
             <a:r>
-              <a:rPr kumimoji="1" lang="ja-JP" altLang="en-US" sz="1400" dirty="0"/>
+              <a:rPr kumimoji="1" lang="ja-JP" altLang="en-US" sz="2000" dirty="0"/>
               <a:t>コード解析等</a:t>
             </a:r>
           </a:p>
@@ -5437,8 +5380,8 @@
         </p:nvSpPr>
         <p:spPr>
           <a:xfrm>
-            <a:off x="13313602" y="4504508"/>
-            <a:ext cx="2203566" cy="307777"/>
+            <a:off x="13313602" y="4441448"/>
+            <a:ext cx="2203566" cy="707886"/>
           </a:xfrm>
           <a:prstGeom prst="rect">
             <a:avLst/>
@@ -5452,11 +5395,13 @@
           <a:lstStyle/>
           <a:p>
             <a:r>
-              <a:rPr kumimoji="1" lang="en-US" altLang="ja-JP" sz="1400" dirty="0"/>
+              <a:rPr kumimoji="1" lang="en-US" altLang="ja-JP" sz="2000" dirty="0"/>
               <a:t>MusicXML</a:t>
             </a:r>
-            <a:r>
-              <a:rPr kumimoji="1" lang="ja-JP" altLang="en-US" sz="1400" dirty="0"/>
+          </a:p>
+          <a:p>
+            <a:r>
+              <a:rPr kumimoji="1" lang="ja-JP" altLang="en-US" sz="2000" dirty="0"/>
               <a:t>インポート等</a:t>
             </a:r>
           </a:p>
@@ -5476,8 +5421,8 @@
         </p:nvSpPr>
         <p:spPr>
           <a:xfrm>
-            <a:off x="13315765" y="5365979"/>
-            <a:ext cx="1735325" cy="307777"/>
+            <a:off x="13315765" y="5555162"/>
+            <a:ext cx="1735325" cy="400110"/>
           </a:xfrm>
           <a:prstGeom prst="rect">
             <a:avLst/>
@@ -5491,9 +5436,280 @@
           <a:lstStyle/>
           <a:p>
             <a:r>
-              <a:rPr kumimoji="1" lang="ja-JP" altLang="en-US" sz="1400" dirty="0"/>
+              <a:rPr kumimoji="1" lang="ja-JP" altLang="en-US" sz="2000" dirty="0"/>
               <a:t>テーマ変更等</a:t>
             </a:r>
+          </a:p>
+        </p:txBody>
+      </p:sp>
+      <p:sp>
+        <p:nvSpPr>
+          <p:cNvPr id="3" name="テキスト ボックス 2">
+            <a:extLst>
+              <a:ext uri="{FF2B5EF4-FFF2-40B4-BE49-F238E27FC236}">
+                <a16:creationId xmlns:a16="http://schemas.microsoft.com/office/drawing/2014/main" id="{A83F635D-1B94-0F8F-801B-12791418A310}"/>
+              </a:ext>
+            </a:extLst>
+          </p:cNvPr>
+          <p:cNvSpPr txBox="1"/>
+          <p:nvPr/>
+        </p:nvSpPr>
+        <p:spPr>
+          <a:xfrm>
+            <a:off x="684344" y="2368686"/>
+            <a:ext cx="3030453" cy="830997"/>
+          </a:xfrm>
+          <a:prstGeom prst="rect">
+            <a:avLst/>
+          </a:prstGeom>
+          <a:noFill/>
+        </p:spPr>
+        <p:txBody>
+          <a:bodyPr wrap="square">
+            <a:spAutoFit/>
+          </a:bodyPr>
+          <a:lstStyle/>
+          <a:p>
+            <a:pPr algn="ctr"/>
+            <a:r>
+              <a:rPr lang="ja-JP" altLang="en-US" sz="2400" dirty="0">
+                <a:solidFill>
+                  <a:schemeClr val="tx1"/>
+                </a:solidFill>
+              </a:rPr>
+              <a:t>プラグインファイル</a:t>
+            </a:r>
+            <a:endParaRPr lang="en-US" altLang="ja-JP" sz="2400" dirty="0">
+              <a:solidFill>
+                <a:schemeClr val="tx1"/>
+              </a:solidFill>
+            </a:endParaRPr>
+          </a:p>
+          <a:p>
+            <a:pPr algn="ctr"/>
+            <a:r>
+              <a:rPr lang="ja-JP" altLang="en-US" sz="2400" dirty="0">
+                <a:solidFill>
+                  <a:schemeClr val="tx1"/>
+                </a:solidFill>
+              </a:rPr>
+              <a:t>（</a:t>
+            </a:r>
+            <a:r>
+              <a:rPr lang="en-US" altLang="ja-JP" sz="2400" dirty="0">
+                <a:solidFill>
+                  <a:schemeClr val="tx1"/>
+                </a:solidFill>
+                <a:latin typeface="Consolas" panose="020B0609020204030204" pitchFamily="49" charset="0"/>
+              </a:rPr>
+              <a:t>.ts</a:t>
+            </a:r>
+            <a:r>
+              <a:rPr lang="ja-JP" altLang="en-US" sz="2400" dirty="0">
+                <a:solidFill>
+                  <a:schemeClr val="tx1"/>
+                </a:solidFill>
+              </a:rPr>
+              <a:t>）を用意</a:t>
+            </a:r>
+          </a:p>
+        </p:txBody>
+      </p:sp>
+      <p:sp>
+        <p:nvSpPr>
+          <p:cNvPr id="8" name="テキスト ボックス 7">
+            <a:extLst>
+              <a:ext uri="{FF2B5EF4-FFF2-40B4-BE49-F238E27FC236}">
+                <a16:creationId xmlns:a16="http://schemas.microsoft.com/office/drawing/2014/main" id="{594743A7-2212-B932-94D3-3947FAED9FCC}"/>
+              </a:ext>
+            </a:extLst>
+          </p:cNvPr>
+          <p:cNvSpPr txBox="1"/>
+          <p:nvPr/>
+        </p:nvSpPr>
+        <p:spPr>
+          <a:xfrm>
+            <a:off x="5635962" y="2238736"/>
+            <a:ext cx="2064103" cy="461665"/>
+          </a:xfrm>
+          <a:prstGeom prst="rect">
+            <a:avLst/>
+          </a:prstGeom>
+          <a:noFill/>
+        </p:spPr>
+        <p:txBody>
+          <a:bodyPr wrap="square">
+            <a:spAutoFit/>
+          </a:bodyPr>
+          <a:lstStyle/>
+          <a:p>
+            <a:pPr algn="ctr"/>
+            <a:r>
+              <a:rPr lang="ja-JP" altLang="en-US" sz="2400" dirty="0">
+                <a:solidFill>
+                  <a:schemeClr val="tx1"/>
+                </a:solidFill>
+              </a:rPr>
+              <a:t>ファイル検知</a:t>
+            </a:r>
+          </a:p>
+        </p:txBody>
+      </p:sp>
+      <p:sp>
+        <p:nvSpPr>
+          <p:cNvPr id="11" name="テキスト ボックス 10">
+            <a:extLst>
+              <a:ext uri="{FF2B5EF4-FFF2-40B4-BE49-F238E27FC236}">
+                <a16:creationId xmlns:a16="http://schemas.microsoft.com/office/drawing/2014/main" id="{CA3304F2-2821-15AD-E636-70663916443F}"/>
+              </a:ext>
+            </a:extLst>
+          </p:cNvPr>
+          <p:cNvSpPr txBox="1"/>
+          <p:nvPr/>
+        </p:nvSpPr>
+        <p:spPr>
+          <a:xfrm>
+            <a:off x="5869370" y="3974888"/>
+            <a:ext cx="1534631" cy="830997"/>
+          </a:xfrm>
+          <a:prstGeom prst="rect">
+            <a:avLst/>
+          </a:prstGeom>
+          <a:noFill/>
+        </p:spPr>
+        <p:txBody>
+          <a:bodyPr wrap="square">
+            <a:spAutoFit/>
+          </a:bodyPr>
+          <a:lstStyle/>
+          <a:p>
+            <a:pPr algn="ctr"/>
+            <a:r>
+              <a:rPr lang="ja-JP" altLang="en-US" sz="2400" dirty="0">
+                <a:solidFill>
+                  <a:schemeClr val="tx1"/>
+                </a:solidFill>
+              </a:rPr>
+              <a:t>読み込み</a:t>
+            </a:r>
+            <a:endParaRPr lang="en-US" altLang="ja-JP" sz="2400" dirty="0">
+              <a:solidFill>
+                <a:schemeClr val="tx1"/>
+              </a:solidFill>
+            </a:endParaRPr>
+          </a:p>
+          <a:p>
+            <a:pPr algn="ctr"/>
+            <a:r>
+              <a:rPr lang="ja-JP" altLang="en-US" sz="2400" dirty="0">
+                <a:solidFill>
+                  <a:schemeClr val="tx1"/>
+                </a:solidFill>
+              </a:rPr>
+              <a:t>初期化</a:t>
+            </a:r>
+            <a:endParaRPr lang="en-US" altLang="ja-JP" sz="2400" dirty="0">
+              <a:solidFill>
+                <a:schemeClr val="tx1"/>
+              </a:solidFill>
+            </a:endParaRPr>
+          </a:p>
+        </p:txBody>
+      </p:sp>
+      <p:sp>
+        <p:nvSpPr>
+          <p:cNvPr id="18" name="テキスト ボックス 17">
+            <a:extLst>
+              <a:ext uri="{FF2B5EF4-FFF2-40B4-BE49-F238E27FC236}">
+                <a16:creationId xmlns:a16="http://schemas.microsoft.com/office/drawing/2014/main" id="{957EB851-2770-B0C9-CB5D-8E589239E33B}"/>
+              </a:ext>
+            </a:extLst>
+          </p:cNvPr>
+          <p:cNvSpPr txBox="1"/>
+          <p:nvPr/>
+        </p:nvSpPr>
+        <p:spPr>
+          <a:xfrm>
+            <a:off x="8968772" y="4400896"/>
+            <a:ext cx="2320468" cy="830997"/>
+          </a:xfrm>
+          <a:prstGeom prst="rect">
+            <a:avLst/>
+          </a:prstGeom>
+          <a:noFill/>
+        </p:spPr>
+        <p:txBody>
+          <a:bodyPr wrap="square">
+            <a:spAutoFit/>
+          </a:bodyPr>
+          <a:lstStyle/>
+          <a:p>
+            <a:pPr algn="ctr"/>
+            <a:r>
+              <a:rPr lang="ja-JP" altLang="en-US" sz="2400" dirty="0">
+                <a:solidFill>
+                  <a:schemeClr val="tx1"/>
+                </a:solidFill>
+              </a:rPr>
+              <a:t>専用ウィンドウ</a:t>
+            </a:r>
+            <a:endParaRPr lang="en-US" altLang="ja-JP" sz="2400" dirty="0">
+              <a:solidFill>
+                <a:schemeClr val="tx1"/>
+              </a:solidFill>
+            </a:endParaRPr>
+          </a:p>
+          <a:p>
+            <a:pPr algn="ctr"/>
+            <a:r>
+              <a:rPr lang="ja-JP" altLang="en-US" sz="2400" dirty="0">
+                <a:solidFill>
+                  <a:schemeClr val="tx1"/>
+                </a:solidFill>
+              </a:rPr>
+              <a:t>を表示</a:t>
+            </a:r>
+          </a:p>
+        </p:txBody>
+      </p:sp>
+      <p:sp>
+        <p:nvSpPr>
+          <p:cNvPr id="22" name="テキスト ボックス 21">
+            <a:extLst>
+              <a:ext uri="{FF2B5EF4-FFF2-40B4-BE49-F238E27FC236}">
+                <a16:creationId xmlns:a16="http://schemas.microsoft.com/office/drawing/2014/main" id="{7560E9DE-12F3-3C53-8CF4-81B1B8FF07D9}"/>
+              </a:ext>
+            </a:extLst>
+          </p:cNvPr>
+          <p:cNvSpPr txBox="1"/>
+          <p:nvPr/>
+        </p:nvSpPr>
+        <p:spPr>
+          <a:xfrm>
+            <a:off x="8741127" y="961812"/>
+            <a:ext cx="2596865" cy="523220"/>
+          </a:xfrm>
+          <a:prstGeom prst="rect">
+            <a:avLst/>
+          </a:prstGeom>
+          <a:noFill/>
+        </p:spPr>
+        <p:txBody>
+          <a:bodyPr wrap="square">
+            <a:spAutoFit/>
+          </a:bodyPr>
+          <a:lstStyle/>
+          <a:p>
+            <a:pPr algn="ctr"/>
+            <a:r>
+              <a:rPr kumimoji="1" lang="ja-JP" altLang="en-US" sz="2800" dirty="0">
+                <a:solidFill>
+                  <a:schemeClr val="tx1"/>
+                </a:solidFill>
+              </a:rPr>
+              <a:t> 画面への反映</a:t>
+            </a:r>
+            <a:endParaRPr lang="ja-JP" altLang="en-US" sz="2800" dirty="0"/>
           </a:p>
         </p:txBody>
       </p:sp>
